--- a/midterm_pres.pptx
+++ b/midterm_pres.pptx
@@ -285,7 +285,7 @@
               <a:pPr>
                 <a:defRPr/>
               </a:pPr>
-              <a:t>03.12.2025</a:t>
+              <a:t>04.12.2025</a:t>
             </a:fld>
             <a:endParaRPr lang="de-DE" altLang="de-DE" dirty="0">
               <a:latin typeface="Arial" panose="020B0604020202020204" pitchFamily="34" charset="0"/>
@@ -515,7 +515,7 @@
               <a:pPr>
                 <a:defRPr/>
               </a:pPr>
-              <a:t>03.12.2025</a:t>
+              <a:t>04.12.2025</a:t>
             </a:fld>
             <a:endParaRPr lang="de-DE" altLang="de-DE" dirty="0"/>
           </a:p>
@@ -1220,7 +1220,21 @@
             </a:pPr>
             <a:r>
               <a:rPr lang="en-GB" dirty="0"/>
-              <a:t>And we will </a:t>
+              <a:t>And we will the BTC data in the same time period. As you can see it does a nice rollercoaster movement.</a:t>
+            </a:r>
+          </a:p>
+          <a:p>
+            <a:pPr marL="171450" indent="-171450">
+              <a:buFont typeface="Arial" panose="020B0604020202020204" pitchFamily="34" charset="0"/>
+              <a:buChar char="•"/>
+            </a:pPr>
+            <a:r>
+              <a:rPr lang="en-GB" dirty="0"/>
+              <a:t>Daniel will share further details about </a:t>
+            </a:r>
+            <a:r>
+              <a:rPr lang="en-GB"/>
+              <a:t>the analysis </a:t>
             </a:r>
             <a:endParaRPr lang="en-DE" dirty="0"/>
           </a:p>
